--- a/site/clases/parte-2-deep-learning/105-keras-tuner/clase-105-keras-tuner-presentacion.pptx
+++ b/site/clases/parte-2-deep-learning/105-keras-tuner/clase-105-keras-tuner-presentacion.pptx
@@ -3272,7 +3272,7 @@
                 </a:solidFill>
                 <a:latin typeface="Segoe UI"/>
               </a:rPr>
-              <a:t>Parte: 2 — Deep Learning · Fuente: Géron, cap. 10 § Fine-Tuning Neural Network Hyperparameters + docs Keras Tuner / Optuna / Ray Tune.  Duración estimada: 85 min.</a:t>
+              <a:t>Parte: 2 — Deep Learning · Fuente: Géron, cap. 10 § Fine-Tuning Neural Network Hyperparameters + docs Keras Tuner / Optuna / Ray Tune.  Duración estimada: 85 min. · Nivel: Avanzado</a:t>
             </a:r>
           </a:p>
         </p:txBody>
@@ -3581,7 +3581,7 @@
                 </a:solidFill>
                 <a:latin typeface="Segoe UI"/>
               </a:rPr>
-              <a:t>Parte: 2 — Deep Learning · Fuente: Géron, cap. 10 § Fine-Tuning Neural Network Hyperparameters + docs Keras Tuner / Optuna / Ray Tune.  Duración estimada: 85 min.</a:t>
+              <a:t>Parte: 2 — Deep Learning · Fuente: Géron, cap. 10 § Fine-Tuning Neural Network Hyperparameters + docs Keras Tuner / Optuna / Ray Tune.  Duración estimada: 85 min. · Nivel: Avanzado</a:t>
             </a:r>
           </a:p>
         </p:txBody>
@@ -4910,7 +4910,387 @@
                 </a:solidFill>
                 <a:latin typeface="Courier New"/>
               </a:rPr>
-              <a:t># Imports y configuración inicial</a:t>
+              <a:t>import numpy as np</a:t>
+            </a:r>
+          </a:p>
+          <a:p>
+            <a:pPr>
+              <a:defRPr sz="1200" b="0">
+                <a:solidFill>
+                  <a:srgbClr val="F8FAFC"/>
+                </a:solidFill>
+                <a:latin typeface="Courier New"/>
+              </a:defRPr>
+            </a:pPr>
+            <a:r>
+              <a:rPr sz="1200" b="0">
+                <a:solidFill>
+                  <a:srgbClr val="F8FAFC"/>
+                </a:solidFill>
+                <a:latin typeface="Courier New"/>
+              </a:rPr>
+              <a:t>import keras_tuner as kt</a:t>
+            </a:r>
+          </a:p>
+          <a:p>
+            <a:pPr>
+              <a:defRPr sz="1200" b="0">
+                <a:solidFill>
+                  <a:srgbClr val="F8FAFC"/>
+                </a:solidFill>
+                <a:latin typeface="Courier New"/>
+              </a:defRPr>
+            </a:pPr>
+            <a:r>
+              <a:rPr sz="1200" b="0">
+                <a:solidFill>
+                  <a:srgbClr val="F8FAFC"/>
+                </a:solidFill>
+                <a:latin typeface="Courier New"/>
+              </a:rPr>
+              <a:t>from tensorflow import keras</a:t>
+            </a:r>
+          </a:p>
+          <a:p>
+            <a:pPr>
+              <a:defRPr sz="1200" b="0">
+                <a:solidFill>
+                  <a:srgbClr val="F8FAFC"/>
+                </a:solidFill>
+                <a:latin typeface="Courier New"/>
+              </a:defRPr>
+            </a:pPr>
+            <a:r>
+              <a:rPr sz="1200" b="0">
+                <a:solidFill>
+                  <a:srgbClr val="F8FAFC"/>
+                </a:solidFill>
+                <a:latin typeface="Courier New"/>
+              </a:rPr>
+              <a:t>from tensorflow.keras import layers</a:t>
+            </a:r>
+          </a:p>
+          <a:p>
+            <a:pPr>
+              <a:defRPr sz="1200" b="0">
+                <a:solidFill>
+                  <a:srgbClr val="F8FAFC"/>
+                </a:solidFill>
+                <a:latin typeface="Courier New"/>
+              </a:defRPr>
+            </a:pPr>
+            <a:r>
+              <a:rPr sz="1200" b="0">
+                <a:solidFill>
+                  <a:srgbClr val="F8FAFC"/>
+                </a:solidFill>
+                <a:latin typeface="Courier New"/>
+              </a:rPr>
+              <a:t>keras.utils.set_random_seed(42)</a:t>
+            </a:r>
+          </a:p>
+          <a:p>
+            <a:pPr>
+              <a:defRPr sz="1200" b="0">
+                <a:solidFill>
+                  <a:srgbClr val="F8FAFC"/>
+                </a:solidFill>
+                <a:latin typeface="Courier New"/>
+              </a:defRPr>
+            </a:pPr>
+            <a:r>
+              <a:rPr sz="1200" b="0">
+                <a:solidFill>
+                  <a:srgbClr val="F8FAFC"/>
+                </a:solidFill>
+                <a:latin typeface="Courier New"/>
+              </a:rPr>
+              <a:t> </a:t>
+            </a:r>
+          </a:p>
+          <a:p>
+            <a:pPr>
+              <a:defRPr sz="1200" b="0">
+                <a:solidFill>
+                  <a:srgbClr val="F8FAFC"/>
+                </a:solidFill>
+                <a:latin typeface="Courier New"/>
+              </a:defRPr>
+            </a:pPr>
+            <a:r>
+              <a:rPr sz="1200" b="0">
+                <a:solidFill>
+                  <a:srgbClr val="F8FAFC"/>
+                </a:solidFill>
+                <a:latin typeface="Courier New"/>
+              </a:rPr>
+              <a:t>(X_tr, y_tr), (X_te, y_te) = keras.datasets.fashion_mnist.load_data()</a:t>
+            </a:r>
+          </a:p>
+          <a:p>
+            <a:pPr>
+              <a:defRPr sz="1200" b="0">
+                <a:solidFill>
+                  <a:srgbClr val="F8FAFC"/>
+                </a:solidFill>
+                <a:latin typeface="Courier New"/>
+              </a:defRPr>
+            </a:pPr>
+            <a:r>
+              <a:rPr sz="1200" b="0">
+                <a:solidFill>
+                  <a:srgbClr val="F8FAFC"/>
+                </a:solidFill>
+                <a:latin typeface="Courier New"/>
+              </a:rPr>
+              <a:t>X_tr = X_tr.astype("float32") / 255.0</a:t>
+            </a:r>
+          </a:p>
+          <a:p>
+            <a:pPr>
+              <a:defRPr sz="1200" b="0">
+                <a:solidFill>
+                  <a:srgbClr val="F8FAFC"/>
+                </a:solidFill>
+                <a:latin typeface="Courier New"/>
+              </a:defRPr>
+            </a:pPr>
+            <a:r>
+              <a:rPr sz="1200" b="0">
+                <a:solidFill>
+                  <a:srgbClr val="F8FAFC"/>
+                </a:solidFill>
+                <a:latin typeface="Courier New"/>
+              </a:rPr>
+              <a:t>X_te = X_te.astype("float32") / 255.0</a:t>
+            </a:r>
+          </a:p>
+          <a:p>
+            <a:pPr>
+              <a:defRPr sz="1200" b="0">
+                <a:solidFill>
+                  <a:srgbClr val="F8FAFC"/>
+                </a:solidFill>
+                <a:latin typeface="Courier New"/>
+              </a:defRPr>
+            </a:pPr>
+            <a:r>
+              <a:rPr sz="1200" b="0">
+                <a:solidFill>
+                  <a:srgbClr val="F8FAFC"/>
+                </a:solidFill>
+                <a:latin typeface="Courier New"/>
+              </a:rPr>
+              <a:t> </a:t>
+            </a:r>
+          </a:p>
+          <a:p>
+            <a:pPr>
+              <a:defRPr sz="1200" b="0">
+                <a:solidFill>
+                  <a:srgbClr val="F8FAFC"/>
+                </a:solidFill>
+                <a:latin typeface="Courier New"/>
+              </a:defRPr>
+            </a:pPr>
+            <a:r>
+              <a:rPr sz="1200" b="0">
+                <a:solidFill>
+                  <a:srgbClr val="F8FAFC"/>
+                </a:solidFill>
+                <a:latin typeface="Courier New"/>
+              </a:rPr>
+              <a:t>def build_model(hp):</a:t>
+            </a:r>
+          </a:p>
+          <a:p>
+            <a:pPr>
+              <a:defRPr sz="1200" b="0">
+                <a:solidFill>
+                  <a:srgbClr val="F8FAFC"/>
+                </a:solidFill>
+                <a:latin typeface="Courier New"/>
+              </a:defRPr>
+            </a:pPr>
+            <a:r>
+              <a:rPr sz="1200" b="0">
+                <a:solidFill>
+                  <a:srgbClr val="F8FAFC"/>
+                </a:solidFill>
+                <a:latin typeface="Courier New"/>
+              </a:rPr>
+              <a:t>    # los hiperparámetros se declaran con hp.Int / hp.Float / hp.Choice</a:t>
+            </a:r>
+          </a:p>
+          <a:p>
+            <a:pPr>
+              <a:defRPr sz="1200" b="0">
+                <a:solidFill>
+                  <a:srgbClr val="F8FAFC"/>
+                </a:solidFill>
+                <a:latin typeface="Courier New"/>
+              </a:defRPr>
+            </a:pPr>
+            <a:r>
+              <a:rPr sz="1200" b="0">
+                <a:solidFill>
+                  <a:srgbClr val="F8FAFC"/>
+                </a:solidFill>
+                <a:latin typeface="Courier New"/>
+              </a:rPr>
+              <a:t>    n_units = hp.Choice("units", values=[32, 64, 128])</a:t>
+            </a:r>
+          </a:p>
+          <a:p>
+            <a:pPr>
+              <a:defRPr sz="1200" b="0">
+                <a:solidFill>
+                  <a:srgbClr val="F8FAFC"/>
+                </a:solidFill>
+                <a:latin typeface="Courier New"/>
+              </a:defRPr>
+            </a:pPr>
+            <a:r>
+              <a:rPr sz="1200" b="0">
+                <a:solidFill>
+                  <a:srgbClr val="F8FAFC"/>
+                </a:solidFill>
+                <a:latin typeface="Courier New"/>
+              </a:rPr>
+              <a:t>    lr = hp.Float("lr", min_value=1e-4, max_value=1e-2, sampling="log")  # log para LR</a:t>
+            </a:r>
+          </a:p>
+          <a:p>
+            <a:pPr>
+              <a:defRPr sz="1200" b="0">
+                <a:solidFill>
+                  <a:srgbClr val="F8FAFC"/>
+                </a:solidFill>
+                <a:latin typeface="Courier New"/>
+              </a:defRPr>
+            </a:pPr>
+            <a:r>
+              <a:rPr sz="1200" b="0">
+                <a:solidFill>
+                  <a:srgbClr val="F8FAFC"/>
+                </a:solidFill>
+                <a:latin typeface="Courier New"/>
+              </a:rPr>
+              <a:t>    modelo = keras.Sequential([</a:t>
+            </a:r>
+          </a:p>
+          <a:p>
+            <a:pPr>
+              <a:defRPr sz="1200" b="0">
+                <a:solidFill>
+                  <a:srgbClr val="F8FAFC"/>
+                </a:solidFill>
+                <a:latin typeface="Courier New"/>
+              </a:defRPr>
+            </a:pPr>
+            <a:r>
+              <a:rPr sz="1200" b="0">
+                <a:solidFill>
+                  <a:srgbClr val="F8FAFC"/>
+                </a:solidFill>
+                <a:latin typeface="Courier New"/>
+              </a:rPr>
+              <a:t>        keras.Input(shape=(28, 28)),</a:t>
+            </a:r>
+          </a:p>
+          <a:p>
+            <a:pPr>
+              <a:defRPr sz="1200" b="0">
+                <a:solidFill>
+                  <a:srgbClr val="F8FAFC"/>
+                </a:solidFill>
+                <a:latin typeface="Courier New"/>
+              </a:defRPr>
+            </a:pPr>
+            <a:r>
+              <a:rPr sz="1200" b="0">
+                <a:solidFill>
+                  <a:srgbClr val="F8FAFC"/>
+                </a:solidFill>
+                <a:latin typeface="Courier New"/>
+              </a:rPr>
+              <a:t>        layers.Flatten(),</a:t>
+            </a:r>
+          </a:p>
+          <a:p>
+            <a:pPr>
+              <a:defRPr sz="1200" b="0">
+                <a:solidFill>
+                  <a:srgbClr val="F8FAFC"/>
+                </a:solidFill>
+                <a:latin typeface="Courier New"/>
+              </a:defRPr>
+            </a:pPr>
+            <a:r>
+              <a:rPr sz="1200" b="0">
+                <a:solidFill>
+                  <a:srgbClr val="F8FAFC"/>
+                </a:solidFill>
+                <a:latin typeface="Courier New"/>
+              </a:rPr>
+              <a:t>        layers.Dense(n_units, activation="relu"),</a:t>
+            </a:r>
+          </a:p>
+          <a:p>
+            <a:pPr>
+              <a:defRPr sz="1200" b="0">
+                <a:solidFill>
+                  <a:srgbClr val="F8FAFC"/>
+                </a:solidFill>
+                <a:latin typeface="Courier New"/>
+              </a:defRPr>
+            </a:pPr>
+            <a:r>
+              <a:rPr sz="1200" b="0">
+                <a:solidFill>
+                  <a:srgbClr val="F8FAFC"/>
+                </a:solidFill>
+                <a:latin typeface="Courier New"/>
+              </a:rPr>
+              <a:t>        layers.Dense(10, activation="softmax"),</a:t>
+            </a:r>
+          </a:p>
+          <a:p>
+            <a:pPr>
+              <a:defRPr sz="1200" b="0">
+                <a:solidFill>
+                  <a:srgbClr val="F8FAFC"/>
+                </a:solidFill>
+                <a:latin typeface="Courier New"/>
+              </a:defRPr>
+            </a:pPr>
+            <a:r>
+              <a:rPr sz="1200" b="0">
+                <a:solidFill>
+                  <a:srgbClr val="F8FAFC"/>
+                </a:solidFill>
+                <a:latin typeface="Courier New"/>
+              </a:rPr>
+              <a:t>    ])</a:t>
+            </a:r>
+          </a:p>
+          <a:p>
+            <a:pPr>
+              <a:defRPr sz="1200" b="0">
+                <a:solidFill>
+                  <a:srgbClr val="F8FAFC"/>
+                </a:solidFill>
+                <a:latin typeface="Courier New"/>
+              </a:defRPr>
+            </a:pPr>
+            <a:r>
+              <a:rPr sz="1200" b="0">
+                <a:solidFill>
+                  <a:srgbClr val="F8FAFC"/>
+                </a:solidFill>
+                <a:latin typeface="Courier New"/>
+              </a:rPr>
+              <a:t># ... (truncado)</a:t>
             </a:r>
           </a:p>
         </p:txBody>
